--- a/lab_09-authentication/lab_09-authentication.pptx
+++ b/lab_09-authentication/lab_09-authentication.pptx
@@ -220,7 +220,7 @@
           <a:p>
             <a:fld id="{81C4B3FE-0320-8142-8396-5C3025C019EC}" type="datetimeFigureOut">
               <a:rPr lang="en-IT" smtClean="0"/>
-              <a:t>4/30/24</a:t>
+              <a:t>5/5/25</a:t>
             </a:fld>
             <a:endParaRPr lang="en-IT"/>
           </a:p>
@@ -2446,7 +2446,9 @@
           <a:lstStyle>
             <a:lvl1pPr marL="0" indent="0" algn="ctr">
               <a:buNone/>
-              <a:defRPr sz="4800" b="1"/>
+              <a:defRPr sz="4800" b="1">
+                <a:latin typeface="Aptos" panose="020B0004020202020204" pitchFamily="34" charset="0"/>
+              </a:defRPr>
             </a:lvl1pPr>
             <a:lvl2pPr marL="457200" indent="0" algn="ctr">
               <a:buNone/>
@@ -2532,7 +2534,9 @@
           <a:lstStyle/>
           <a:p>
             <a:pPr algn="ctr"/>
-            <a:endParaRPr lang="en-GB" dirty="0"/>
+            <a:endParaRPr lang="en-GB" dirty="0">
+              <a:latin typeface="Aptos" panose="020B0004020202020204" pitchFamily="34" charset="0"/>
+            </a:endParaRPr>
           </a:p>
         </p:txBody>
       </p:sp>
@@ -2582,7 +2586,9 @@
           <a:lstStyle/>
           <a:p>
             <a:pPr algn="ctr"/>
-            <a:endParaRPr lang="en-GB" dirty="0"/>
+            <a:endParaRPr lang="en-GB" dirty="0">
+              <a:latin typeface="Aptos" panose="020B0004020202020204" pitchFamily="34" charset="0"/>
+            </a:endParaRPr>
           </a:p>
         </p:txBody>
       </p:sp>
@@ -2628,36 +2634,52 @@
           </a:lstStyle>
           <a:p>
             <a:r>
-              <a:rPr lang="it-IT" sz="2800" b="0" dirty="0" err="1"/>
+              <a:rPr lang="it-IT" sz="2800" b="0" dirty="0" err="1">
+                <a:latin typeface="Aptos" panose="020B0004020202020204" pitchFamily="34" charset="0"/>
+              </a:rPr>
               <a:t>Biomedical</a:t>
             </a:r>
             <a:r>
-              <a:rPr lang="it-IT" sz="2800" b="0" dirty="0"/>
+              <a:rPr lang="it-IT" sz="2800" b="0" dirty="0">
+                <a:latin typeface="Aptos" panose="020B0004020202020204" pitchFamily="34" charset="0"/>
+              </a:rPr>
               <a:t> </a:t>
             </a:r>
             <a:r>
-              <a:rPr lang="it-IT" sz="2800" b="0" dirty="0" err="1"/>
+              <a:rPr lang="it-IT" sz="2800" b="0" dirty="0" err="1">
+                <a:latin typeface="Aptos" panose="020B0004020202020204" pitchFamily="34" charset="0"/>
+              </a:rPr>
               <a:t>Wearable</a:t>
             </a:r>
             <a:r>
-              <a:rPr lang="it-IT" sz="2800" b="0" dirty="0"/>
+              <a:rPr lang="it-IT" sz="2800" b="0" dirty="0">
+                <a:latin typeface="Aptos" panose="020B0004020202020204" pitchFamily="34" charset="0"/>
+              </a:rPr>
               <a:t> Technologies </a:t>
             </a:r>
           </a:p>
           <a:p>
             <a:r>
-              <a:rPr lang="it-IT" sz="2800" b="0" dirty="0"/>
+              <a:rPr lang="it-IT" sz="2800" b="0" dirty="0">
+                <a:latin typeface="Aptos" panose="020B0004020202020204" pitchFamily="34" charset="0"/>
+              </a:rPr>
               <a:t>for Healthcare and </a:t>
             </a:r>
             <a:r>
-              <a:rPr lang="it-IT" sz="2800" b="0" dirty="0" err="1"/>
+              <a:rPr lang="it-IT" sz="2800" b="0" dirty="0" err="1">
+                <a:latin typeface="Aptos" panose="020B0004020202020204" pitchFamily="34" charset="0"/>
+              </a:rPr>
               <a:t>Wellbeing</a:t>
             </a:r>
             <a:r>
-              <a:rPr lang="it-IT" sz="2800" b="0" dirty="0"/>
+              <a:rPr lang="it-IT" sz="2800" b="0" dirty="0">
+                <a:latin typeface="Aptos" panose="020B0004020202020204" pitchFamily="34" charset="0"/>
+              </a:rPr>
               <a:t>  </a:t>
             </a:r>
-            <a:endParaRPr lang="en-GB" sz="2800" b="0" dirty="0"/>
+            <a:endParaRPr lang="en-GB" sz="2800" b="0" dirty="0">
+              <a:latin typeface="Aptos" panose="020B0004020202020204" pitchFamily="34" charset="0"/>
+            </a:endParaRPr>
           </a:p>
         </p:txBody>
       </p:sp>
@@ -2708,8 +2730,10 @@
               </a:spcAft>
             </a:pPr>
             <a:r>
-              <a:rPr lang="it-IT" sz="2800" dirty="0"/>
-              <a:t>A.Y. 2023-2024</a:t>
+              <a:rPr lang="it-IT" sz="2800" dirty="0">
+                <a:latin typeface="Aptos" panose="020B0004020202020204" pitchFamily="34" charset="0"/>
+              </a:rPr>
+              <a:t>A.Y. 2024-2025</a:t>
             </a:r>
           </a:p>
         </p:txBody>
@@ -2748,7 +2772,7 @@
                 <a:effectLst/>
                 <a:uLnTx/>
                 <a:uFillTx/>
-                <a:latin typeface="Palatino Linotype" panose="02040502050505030304" pitchFamily="18" charset="0"/>
+                <a:latin typeface="Aptos" panose="020B0004020202020204" pitchFamily="34" charset="0"/>
                 <a:ea typeface="+mj-ea"/>
                 <a:cs typeface="+mj-cs"/>
               </a:rPr>
@@ -2765,7 +2789,7 @@
                 <a:effectLst/>
                 <a:uLnTx/>
                 <a:uFillTx/>
-                <a:latin typeface="Palatino Linotype" panose="02040502050505030304" pitchFamily="18" charset="0"/>
+                <a:latin typeface="Aptos" panose="020B0004020202020204" pitchFamily="34" charset="0"/>
                 <a:ea typeface="+mj-ea"/>
                 <a:cs typeface="+mj-cs"/>
               </a:rPr>
@@ -2782,7 +2806,7 @@
                 <a:effectLst/>
                 <a:uLnTx/>
                 <a:uFillTx/>
-                <a:latin typeface="Palatino Linotype" panose="02040502050505030304" pitchFamily="18" charset="0"/>
+                <a:latin typeface="Aptos" panose="020B0004020202020204" pitchFamily="34" charset="0"/>
                 <a:ea typeface="+mj-ea"/>
                 <a:cs typeface="+mj-cs"/>
               </a:rPr>
@@ -2798,7 +2822,7 @@
                 <a:effectLst/>
                 <a:uLnTx/>
                 <a:uFillTx/>
-                <a:latin typeface="Palatino Linotype" panose="02040502050505030304" pitchFamily="18" charset="0"/>
+                <a:latin typeface="Aptos" panose="020B0004020202020204" pitchFamily="34" charset="0"/>
                 <a:ea typeface="+mj-ea"/>
                 <a:cs typeface="+mj-cs"/>
               </a:rPr>
@@ -2815,7 +2839,7 @@
                 <a:effectLst/>
                 <a:uLnTx/>
                 <a:uFillTx/>
-                <a:latin typeface="Palatino Linotype" panose="02040502050505030304" pitchFamily="18" charset="0"/>
+                <a:latin typeface="Aptos" panose="020B0004020202020204" pitchFamily="34" charset="0"/>
                 <a:ea typeface="+mj-ea"/>
                 <a:cs typeface="+mj-cs"/>
               </a:rPr>
@@ -2832,13 +2856,15 @@
                 <a:effectLst/>
                 <a:uLnTx/>
                 <a:uFillTx/>
-                <a:latin typeface="Palatino Linotype" panose="02040502050505030304" pitchFamily="18" charset="0"/>
+                <a:latin typeface="Aptos" panose="020B0004020202020204" pitchFamily="34" charset="0"/>
                 <a:ea typeface="+mj-ea"/>
                 <a:cs typeface="+mj-cs"/>
               </a:rPr>
               <a:t>Engineering</a:t>
             </a:r>
-            <a:endParaRPr lang="en-GB" sz="1100" cap="small" baseline="0" dirty="0"/>
+            <a:endParaRPr lang="en-GB" sz="1100" cap="small" baseline="0" dirty="0">
+              <a:latin typeface="Aptos" panose="020B0004020202020204" pitchFamily="34" charset="0"/>
+            </a:endParaRPr>
           </a:p>
         </p:txBody>
       </p:sp>
@@ -2948,7 +2974,9 @@
           </a:bodyPr>
           <a:lstStyle>
             <a:lvl1pPr>
-              <a:defRPr sz="3200"/>
+              <a:defRPr sz="3200">
+                <a:latin typeface="Aptos" panose="020B0004020202020204" pitchFamily="34" charset="0"/>
+              </a:defRPr>
             </a:lvl1pPr>
           </a:lstStyle>
           <a:p>
@@ -3348,12 +3376,14 @@
                     <a:tint val="75000"/>
                   </a:schemeClr>
                 </a:solidFill>
+                <a:latin typeface="Aptos" panose="020B0004020202020204" pitchFamily="34" charset="0"/>
               </a:defRPr>
             </a:lvl1pPr>
           </a:lstStyle>
           <a:p>
             <a:fld id="{31DE2C5B-556E-47B8-A792-024C2FCA4ACC}" type="slidenum">
               <a:rPr lang="en-GB" smtClean="0"/>
+              <a:pPr/>
               <a:t>‹#›</a:t>
             </a:fld>
             <a:endParaRPr lang="en-GB"/>
@@ -3388,7 +3418,7 @@
           <a:solidFill>
             <a:schemeClr val="tx1"/>
           </a:solidFill>
-          <a:latin typeface="Palatino Linotype" panose="02040502050505030304" pitchFamily="18" charset="0"/>
+          <a:latin typeface="Aptos" panose="020B0004020202020204" pitchFamily="34" charset="0"/>
           <a:ea typeface="+mj-ea"/>
           <a:cs typeface="+mj-cs"/>
         </a:defRPr>
@@ -3411,7 +3441,7 @@
           <a:solidFill>
             <a:schemeClr val="tx1"/>
           </a:solidFill>
-          <a:latin typeface="Palatino Linotype" panose="02040502050505030304" pitchFamily="18" charset="0"/>
+          <a:latin typeface="Aptos" panose="020B0004020202020204" pitchFamily="34" charset="0"/>
           <a:ea typeface="+mn-ea"/>
           <a:cs typeface="+mn-cs"/>
         </a:defRPr>
@@ -3432,7 +3462,7 @@
           <a:solidFill>
             <a:schemeClr val="tx1"/>
           </a:solidFill>
-          <a:latin typeface="Palatino Linotype" panose="02040502050505030304" pitchFamily="18" charset="0"/>
+          <a:latin typeface="Aptos" panose="020B0004020202020204" pitchFamily="34" charset="0"/>
           <a:ea typeface="+mn-ea"/>
           <a:cs typeface="+mn-cs"/>
         </a:defRPr>
@@ -3453,7 +3483,7 @@
           <a:solidFill>
             <a:schemeClr val="tx1"/>
           </a:solidFill>
-          <a:latin typeface="Palatino Linotype" panose="02040502050505030304" pitchFamily="18" charset="0"/>
+          <a:latin typeface="Aptos" panose="020B0004020202020204" pitchFamily="34" charset="0"/>
           <a:ea typeface="+mn-ea"/>
           <a:cs typeface="+mn-cs"/>
         </a:defRPr>
@@ -3474,7 +3504,7 @@
           <a:solidFill>
             <a:schemeClr val="tx1"/>
           </a:solidFill>
-          <a:latin typeface="Palatino Linotype" panose="02040502050505030304" pitchFamily="18" charset="0"/>
+          <a:latin typeface="Aptos" panose="020B0004020202020204" pitchFamily="34" charset="0"/>
           <a:ea typeface="+mn-ea"/>
           <a:cs typeface="+mn-cs"/>
         </a:defRPr>
@@ -3495,7 +3525,7 @@
           <a:solidFill>
             <a:schemeClr val="tx1"/>
           </a:solidFill>
-          <a:latin typeface="Palatino Linotype" panose="02040502050505030304" pitchFamily="18" charset="0"/>
+          <a:latin typeface="Aptos" panose="020B0004020202020204" pitchFamily="34" charset="0"/>
           <a:ea typeface="+mn-ea"/>
           <a:cs typeface="+mn-cs"/>
         </a:defRPr>
@@ -4695,7 +4725,7 @@
         </p:spPr>
         <p:txBody>
           <a:bodyPr>
-            <a:normAutofit fontScale="92500"/>
+            <a:normAutofit lnSpcReduction="10000"/>
           </a:bodyPr>
           <a:lstStyle/>
           <a:p>
@@ -4858,7 +4888,7 @@
             <a:pPr algn="ctr"/>
             <a:r>
               <a:rPr lang="en-IT" b="1" dirty="0">
-                <a:latin typeface="Palatino Linotype" panose="02040502050505030304" pitchFamily="18" charset="0"/>
+                <a:latin typeface="Aptos" panose="020B0004020202020204" pitchFamily="34" charset="0"/>
               </a:rPr>
               <a:t>Only if you are using your physical device</a:t>
             </a:r>
@@ -5172,10 +5202,14 @@
           </a:lstStyle>
           <a:p>
             <a:r>
-              <a:rPr lang="en-IT" dirty="0"/>
+              <a:rPr lang="en-IT" dirty="0">
+                <a:latin typeface="Aptos" panose="020B0004020202020204" pitchFamily="34" charset="0"/>
+              </a:rPr>
               <a:t>Let’s implement the operations required by the  authorization flow</a:t>
             </a:r>
-            <a:endParaRPr lang="en-IT" b="1" dirty="0"/>
+            <a:endParaRPr lang="en-IT" b="1" dirty="0">
+              <a:latin typeface="Aptos" panose="020B0004020202020204" pitchFamily="34" charset="0"/>
+            </a:endParaRPr>
           </a:p>
         </p:txBody>
       </p:sp>
@@ -5397,6 +5431,7 @@
             </a:pPr>
             <a:r>
               <a:rPr lang="en-IT" sz="1600" dirty="0">
+                <a:latin typeface="Aptos" panose="020B0004020202020204" pitchFamily="34" charset="0"/>
                 <a:ea typeface="Palatino" pitchFamily="2" charset="77"/>
               </a:rPr>
               <a:t>Full example in lab_09-authorization/impact_authorization/</a:t>
@@ -5447,7 +5482,7 @@
             <a:pPr algn="ctr"/>
             <a:r>
               <a:rPr lang="en-IT" dirty="0">
-                <a:latin typeface="Palatino Linotype" panose="02040502050505030304" pitchFamily="18" charset="0"/>
+                <a:latin typeface="Aptos" panose="020B0004020202020204" pitchFamily="34" charset="0"/>
               </a:rPr>
               <a:t>Use credentials to ask for a JWT token pair</a:t>
             </a:r>
@@ -5497,7 +5532,7 @@
             <a:pPr algn="ctr"/>
             <a:r>
               <a:rPr lang="en-IT" dirty="0">
-                <a:latin typeface="Palatino Linotype" panose="02040502050505030304" pitchFamily="18" charset="0"/>
+                <a:latin typeface="Aptos" panose="020B0004020202020204" pitchFamily="34" charset="0"/>
               </a:rPr>
               <a:t>Receive JWT token pair</a:t>
             </a:r>
@@ -5547,7 +5582,7 @@
             <a:pPr algn="ctr"/>
             <a:r>
               <a:rPr lang="en-IT" dirty="0">
-                <a:latin typeface="Palatino Linotype" panose="02040502050505030304" pitchFamily="18" charset="0"/>
+                <a:latin typeface="Aptos" panose="020B0004020202020204" pitchFamily="34" charset="0"/>
               </a:rPr>
               <a:t>Store token pair for making calls</a:t>
             </a:r>
@@ -6337,16 +6372,22 @@
           </a:lstStyle>
           <a:p>
             <a:r>
-              <a:rPr lang="en-US" dirty="0"/>
+              <a:rPr lang="en-US" dirty="0">
+                <a:latin typeface="Aptos" panose="020B0004020202020204" pitchFamily="34" charset="0"/>
+              </a:rPr>
               <a:t>Get familiar with the example</a:t>
             </a:r>
           </a:p>
           <a:p>
-            <a:endParaRPr lang="en-US" dirty="0"/>
-          </a:p>
-          <a:p>
-            <a:r>
-              <a:rPr lang="en-US" dirty="0"/>
+            <a:endParaRPr lang="en-US" dirty="0">
+              <a:latin typeface="Aptos" panose="020B0004020202020204" pitchFamily="34" charset="0"/>
+            </a:endParaRPr>
+          </a:p>
+          <a:p>
+            <a:r>
+              <a:rPr lang="en-US" dirty="0">
+                <a:latin typeface="Aptos" panose="020B0004020202020204" pitchFamily="34" charset="0"/>
+              </a:rPr>
               <a:t>Try to integrate the authorization flow in your project </a:t>
             </a:r>
           </a:p>
@@ -6839,7 +6880,9 @@
           </a:lstStyle>
           <a:p>
             <a:r>
-              <a:rPr lang="en-US" dirty="0"/>
+              <a:rPr lang="en-US" dirty="0">
+                <a:latin typeface="Aptos" panose="020B0004020202020204" pitchFamily="34" charset="0"/>
+              </a:rPr>
               <a:t>Get familiar with the http package</a:t>
             </a:r>
           </a:p>
@@ -7618,6 +7661,7 @@
                 <a:solidFill>
                   <a:srgbClr val="C00000"/>
                 </a:solidFill>
+                <a:latin typeface="Aptos" panose="020B0004020202020204" pitchFamily="34" charset="0"/>
               </a:rPr>
               <a:t>https://impact.dei.unipd.it/bwthw/</a:t>
             </a:r>
@@ -7926,7 +7970,9 @@
               <a:buNone/>
             </a:pPr>
             <a:r>
-              <a:rPr lang="en-IT" sz="1400" dirty="0"/>
+              <a:rPr lang="en-IT" sz="1400" dirty="0">
+                <a:latin typeface="Aptos" panose="020B0004020202020204" pitchFamily="34" charset="0"/>
+              </a:rPr>
               <a:t>Your app</a:t>
             </a:r>
           </a:p>
@@ -8144,7 +8190,9 @@
               <a:buNone/>
             </a:pPr>
             <a:r>
-              <a:rPr lang="en-IT" sz="1600" b="1" dirty="0"/>
+              <a:rPr lang="en-IT" sz="1600" b="1" dirty="0">
+                <a:latin typeface="Aptos" panose="020B0004020202020204" pitchFamily="34" charset="0"/>
+              </a:rPr>
               <a:t>HTTPS requests/responses</a:t>
             </a:r>
           </a:p>
@@ -8237,7 +8285,9 @@
           <a:lstStyle/>
           <a:p>
             <a:pPr algn="ctr"/>
-            <a:endParaRPr lang="en-IT"/>
+            <a:endParaRPr lang="en-IT">
+              <a:latin typeface="Aptos" panose="020B0004020202020204" pitchFamily="34" charset="0"/>
+            </a:endParaRPr>
           </a:p>
         </p:txBody>
       </p:sp>
@@ -8453,7 +8503,9 @@
               <a:buNone/>
             </a:pPr>
             <a:r>
-              <a:rPr lang="en-IT" sz="1400" dirty="0"/>
+              <a:rPr lang="en-IT" sz="1400" dirty="0">
+                <a:latin typeface="Aptos" panose="020B0004020202020204" pitchFamily="34" charset="0"/>
+              </a:rPr>
               <a:t>(If credentials are ok) Receive token</a:t>
             </a:r>
           </a:p>
@@ -8751,7 +8803,9 @@
               <a:buNone/>
             </a:pPr>
             <a:r>
-              <a:rPr lang="en-IT" sz="1400" dirty="0"/>
+              <a:rPr lang="en-IT" sz="1400" dirty="0">
+                <a:latin typeface="Aptos" panose="020B0004020202020204" pitchFamily="34" charset="0"/>
+              </a:rPr>
               <a:t>Ask for specific data using token</a:t>
             </a:r>
           </a:p>
@@ -9010,7 +9064,9 @@
               <a:buNone/>
             </a:pPr>
             <a:r>
-              <a:rPr lang="en-IT" sz="1400" dirty="0"/>
+              <a:rPr lang="en-IT" sz="1400" dirty="0">
+                <a:latin typeface="Aptos" panose="020B0004020202020204" pitchFamily="34" charset="0"/>
+              </a:rPr>
               <a:t>(If request is ok) Receive data (JSON format)</a:t>
             </a:r>
           </a:p>
@@ -9180,7 +9236,9 @@
           <a:lstStyle/>
           <a:p>
             <a:pPr algn="ctr"/>
-            <a:endParaRPr lang="en-IT"/>
+            <a:endParaRPr lang="en-IT">
+              <a:latin typeface="Aptos" panose="020B0004020202020204" pitchFamily="34" charset="0"/>
+            </a:endParaRPr>
           </a:p>
         </p:txBody>
       </p:sp>
@@ -9229,7 +9287,9 @@
           <a:lstStyle/>
           <a:p>
             <a:pPr algn="ctr"/>
-            <a:endParaRPr lang="en-IT"/>
+            <a:endParaRPr lang="en-IT">
+              <a:latin typeface="Aptos" panose="020B0004020202020204" pitchFamily="34" charset="0"/>
+            </a:endParaRPr>
           </a:p>
         </p:txBody>
       </p:sp>
@@ -9444,7 +9504,9 @@
               <a:buNone/>
             </a:pPr>
             <a:r>
-              <a:rPr lang="en-IT" b="1" dirty="0"/>
+              <a:rPr lang="en-IT" b="1" dirty="0">
+                <a:latin typeface="Aptos" panose="020B0004020202020204" pitchFamily="34" charset="0"/>
+              </a:rPr>
               <a:t>Lesson 9</a:t>
             </a:r>
           </a:p>
@@ -9661,7 +9723,9 @@
               <a:buNone/>
             </a:pPr>
             <a:r>
-              <a:rPr lang="en-IT" b="1" dirty="0"/>
+              <a:rPr lang="en-IT" b="1" dirty="0">
+                <a:latin typeface="Aptos" panose="020B0004020202020204" pitchFamily="34" charset="0"/>
+              </a:rPr>
               <a:t>Lesson 10</a:t>
             </a:r>
           </a:p>
@@ -10059,7 +10123,7 @@
             <a:pPr algn="ctr"/>
             <a:r>
               <a:rPr lang="en-IT" dirty="0">
-                <a:latin typeface="Palatino Linotype" panose="02040502050505030304" pitchFamily="18" charset="0"/>
+                <a:latin typeface="Aptos" panose="020B0004020202020204" pitchFamily="34" charset="0"/>
               </a:rPr>
               <a:t>Use credentials to ask for a JWT token pair</a:t>
             </a:r>
@@ -10109,7 +10173,7 @@
             <a:pPr algn="ctr"/>
             <a:r>
               <a:rPr lang="en-IT" dirty="0">
-                <a:latin typeface="Palatino Linotype" panose="02040502050505030304" pitchFamily="18" charset="0"/>
+                <a:latin typeface="Aptos" panose="020B0004020202020204" pitchFamily="34" charset="0"/>
               </a:rPr>
               <a:t>Receive JWT token pair</a:t>
             </a:r>
@@ -10159,7 +10223,7 @@
             <a:pPr algn="ctr"/>
             <a:r>
               <a:rPr lang="en-IT" dirty="0">
-                <a:latin typeface="Palatino Linotype" panose="02040502050505030304" pitchFamily="18" charset="0"/>
+                <a:latin typeface="Aptos" panose="020B0004020202020204" pitchFamily="34" charset="0"/>
               </a:rPr>
               <a:t>Store token pair for making calls</a:t>
             </a:r>
@@ -10384,7 +10448,7 @@
             <a:pPr algn="ctr"/>
             <a:r>
               <a:rPr lang="en-IT" dirty="0">
-                <a:latin typeface="Palatino Linotype" panose="02040502050505030304" pitchFamily="18" charset="0"/>
+                <a:latin typeface="Aptos" panose="020B0004020202020204" pitchFamily="34" charset="0"/>
               </a:rPr>
               <a:t>Access token expired?</a:t>
             </a:r>
@@ -10434,7 +10498,7 @@
             <a:pPr algn="ctr"/>
             <a:r>
               <a:rPr lang="en-IT" dirty="0">
-                <a:latin typeface="Palatino Linotype" panose="02040502050505030304" pitchFamily="18" charset="0"/>
+                <a:latin typeface="Aptos" panose="020B0004020202020204" pitchFamily="34" charset="0"/>
               </a:rPr>
               <a:t>Make a call to get data using access token</a:t>
             </a:r>
@@ -10527,7 +10591,7 @@
             <a:pPr algn="ctr"/>
             <a:r>
               <a:rPr lang="en-IT" dirty="0">
-                <a:latin typeface="Palatino Linotype" panose="02040502050505030304" pitchFamily="18" charset="0"/>
+                <a:latin typeface="Aptos" panose="020B0004020202020204" pitchFamily="34" charset="0"/>
               </a:rPr>
               <a:t>Refresh token expired?</a:t>
             </a:r>
@@ -10836,6 +10900,7 @@
                 <a:solidFill>
                   <a:srgbClr val="C00000"/>
                 </a:solidFill>
+                <a:latin typeface="Aptos" panose="020B0004020202020204" pitchFamily="34" charset="0"/>
               </a:rPr>
               <a:t>NO</a:t>
             </a:r>
@@ -11058,6 +11123,7 @@
                 <a:solidFill>
                   <a:srgbClr val="C00000"/>
                 </a:solidFill>
+                <a:latin typeface="Aptos" panose="020B0004020202020204" pitchFamily="34" charset="0"/>
               </a:rPr>
               <a:t>YES</a:t>
             </a:r>
@@ -11280,6 +11346,7 @@
                 <a:solidFill>
                   <a:srgbClr val="C00000"/>
                 </a:solidFill>
+                <a:latin typeface="Aptos" panose="020B0004020202020204" pitchFamily="34" charset="0"/>
               </a:rPr>
               <a:t>YES</a:t>
             </a:r>
@@ -11329,7 +11396,7 @@
             <a:pPr algn="ctr"/>
             <a:r>
               <a:rPr lang="en-IT" dirty="0">
-                <a:latin typeface="Palatino Linotype" panose="02040502050505030304" pitchFamily="18" charset="0"/>
+                <a:latin typeface="Aptos" panose="020B0004020202020204" pitchFamily="34" charset="0"/>
               </a:rPr>
               <a:t>Redo authorization process</a:t>
             </a:r>
@@ -11595,6 +11662,7 @@
                 <a:solidFill>
                   <a:srgbClr val="C00000"/>
                 </a:solidFill>
+                <a:latin typeface="Aptos" panose="020B0004020202020204" pitchFamily="34" charset="0"/>
               </a:rPr>
               <a:t>NO</a:t>
             </a:r>
@@ -11644,7 +11712,7 @@
             <a:pPr algn="ctr"/>
             <a:r>
               <a:rPr lang="en-IT" dirty="0">
-                <a:latin typeface="Palatino Linotype" panose="02040502050505030304" pitchFamily="18" charset="0"/>
+                <a:latin typeface="Aptos" panose="020B0004020202020204" pitchFamily="34" charset="0"/>
               </a:rPr>
               <a:t>Get a new token pair using the refresh token and store it</a:t>
             </a:r>
@@ -11826,7 +11894,7 @@
             <a:pPr algn="ctr"/>
             <a:r>
               <a:rPr lang="en-IT" dirty="0">
-                <a:latin typeface="Palatino Linotype" panose="02040502050505030304" pitchFamily="18" charset="0"/>
+                <a:latin typeface="Aptos" panose="020B0004020202020204" pitchFamily="34" charset="0"/>
               </a:rPr>
               <a:t>Use credentials to ask for a JWT token pair</a:t>
             </a:r>
@@ -11876,7 +11944,7 @@
             <a:pPr algn="ctr"/>
             <a:r>
               <a:rPr lang="en-IT" dirty="0">
-                <a:latin typeface="Palatino Linotype" panose="02040502050505030304" pitchFamily="18" charset="0"/>
+                <a:latin typeface="Aptos" panose="020B0004020202020204" pitchFamily="34" charset="0"/>
               </a:rPr>
               <a:t>Receive JWT token pair</a:t>
             </a:r>
@@ -11926,7 +11994,7 @@
             <a:pPr algn="ctr"/>
             <a:r>
               <a:rPr lang="en-IT" dirty="0">
-                <a:latin typeface="Palatino Linotype" panose="02040502050505030304" pitchFamily="18" charset="0"/>
+                <a:latin typeface="Aptos" panose="020B0004020202020204" pitchFamily="34" charset="0"/>
               </a:rPr>
               <a:t>Store token pair for making calls</a:t>
             </a:r>
@@ -12062,7 +12130,7 @@
             <a:pPr algn="ctr"/>
             <a:r>
               <a:rPr lang="en-IT" dirty="0">
-                <a:latin typeface="Palatino Linotype" panose="02040502050505030304" pitchFamily="18" charset="0"/>
+                <a:latin typeface="Aptos" panose="020B0004020202020204" pitchFamily="34" charset="0"/>
               </a:rPr>
               <a:t>Access token expired?</a:t>
             </a:r>
@@ -12112,7 +12180,7 @@
             <a:pPr algn="ctr"/>
             <a:r>
               <a:rPr lang="en-IT" dirty="0">
-                <a:latin typeface="Palatino Linotype" panose="02040502050505030304" pitchFamily="18" charset="0"/>
+                <a:latin typeface="Aptos" panose="020B0004020202020204" pitchFamily="34" charset="0"/>
               </a:rPr>
               <a:t>Make a call to get data using access token</a:t>
             </a:r>
@@ -12508,6 +12576,7 @@
                 <a:solidFill>
                   <a:srgbClr val="C00000"/>
                 </a:solidFill>
+                <a:latin typeface="Aptos" panose="020B0004020202020204" pitchFamily="34" charset="0"/>
               </a:rPr>
               <a:t>YES</a:t>
             </a:r>
@@ -12730,6 +12799,7 @@
                 <a:solidFill>
                   <a:srgbClr val="C00000"/>
                 </a:solidFill>
+                <a:latin typeface="Aptos" panose="020B0004020202020204" pitchFamily="34" charset="0"/>
               </a:rPr>
               <a:t>NO</a:t>
             </a:r>
@@ -12822,7 +12892,7 @@
             <a:pPr algn="ctr"/>
             <a:r>
               <a:rPr lang="en-IT" dirty="0">
-                <a:latin typeface="Palatino Linotype" panose="02040502050505030304" pitchFamily="18" charset="0"/>
+                <a:latin typeface="Aptos" panose="020B0004020202020204" pitchFamily="34" charset="0"/>
               </a:rPr>
               <a:t>Refresh token expired?</a:t>
             </a:r>
@@ -12872,7 +12942,7 @@
             <a:pPr algn="ctr"/>
             <a:r>
               <a:rPr lang="en-IT" dirty="0">
-                <a:latin typeface="Palatino Linotype" panose="02040502050505030304" pitchFamily="18" charset="0"/>
+                <a:latin typeface="Aptos" panose="020B0004020202020204" pitchFamily="34" charset="0"/>
               </a:rPr>
               <a:t>Get a new token pair using the refresh token and store it</a:t>
             </a:r>
@@ -13137,6 +13207,7 @@
                 <a:solidFill>
                   <a:srgbClr val="C00000"/>
                 </a:solidFill>
+                <a:latin typeface="Aptos" panose="020B0004020202020204" pitchFamily="34" charset="0"/>
               </a:rPr>
               <a:t>YES</a:t>
             </a:r>
@@ -13359,6 +13430,7 @@
                 <a:solidFill>
                   <a:srgbClr val="C00000"/>
                 </a:solidFill>
+                <a:latin typeface="Aptos" panose="020B0004020202020204" pitchFamily="34" charset="0"/>
               </a:rPr>
               <a:t>NO</a:t>
             </a:r>
@@ -13659,7 +13731,7 @@
         </p:nvSpPr>
         <p:spPr>
           <a:xfrm>
-            <a:off x="214148" y="3540306"/>
+            <a:off x="214148" y="3554266"/>
             <a:ext cx="11549680" cy="2376441"/>
           </a:xfrm>
           <a:prstGeom prst="rect">
@@ -13854,7 +13926,9 @@
               <a:buNone/>
             </a:pPr>
             <a:r>
-              <a:rPr lang="en-US" b="1" dirty="0"/>
+              <a:rPr lang="en-US" b="1" dirty="0">
+                <a:latin typeface="Aptos" panose="020B0004020202020204" pitchFamily="34" charset="0"/>
+              </a:rPr>
               <a:t>&lt;METHOD&gt; &lt;HTTP or HTTPS&gt;://&lt;DOMAIN&gt;/&lt;ENDPOINT&gt;?&lt;PARAMETERS&gt; </a:t>
             </a:r>
           </a:p>
@@ -13863,7 +13937,9 @@
               <a:buNone/>
             </a:pPr>
             <a:r>
-              <a:rPr lang="en-US" b="1" dirty="0"/>
+              <a:rPr lang="en-US" b="1" dirty="0">
+                <a:latin typeface="Aptos" panose="020B0004020202020204" pitchFamily="34" charset="0"/>
+              </a:rPr>
               <a:t>+ </a:t>
             </a:r>
           </a:p>
@@ -13872,7 +13948,9 @@
               <a:buNone/>
             </a:pPr>
             <a:r>
-              <a:rPr lang="en-US" b="1" dirty="0"/>
+              <a:rPr lang="en-US" b="1" dirty="0">
+                <a:latin typeface="Aptos" panose="020B0004020202020204" pitchFamily="34" charset="0"/>
+              </a:rPr>
               <a:t>&lt;BODY&gt; and &lt;HEADERS&gt;</a:t>
             </a:r>
           </a:p>
@@ -14152,11 +14230,15 @@
           </a:lstStyle>
           <a:p>
             <a:r>
-              <a:rPr lang="en-GB" dirty="0"/>
+              <a:rPr lang="en-GB" dirty="0">
+                <a:latin typeface="Aptos" panose="020B0004020202020204" pitchFamily="34" charset="0"/>
+              </a:rPr>
               <a:t>&lt;METHOD&gt; and &lt;ENDPOINT&gt; defines the so-called </a:t>
             </a:r>
             <a:r>
-              <a:rPr lang="en-GB" b="1" dirty="0"/>
+              <a:rPr lang="en-GB" b="1" dirty="0">
+                <a:latin typeface="Aptos" panose="020B0004020202020204" pitchFamily="34" charset="0"/>
+              </a:rPr>
               <a:t>route, e.g.:</a:t>
             </a:r>
           </a:p>
@@ -14165,7 +14247,9 @@
               <a:buNone/>
             </a:pPr>
             <a:r>
-              <a:rPr lang="en-GB" b="1" dirty="0"/>
+              <a:rPr lang="en-GB" b="1" dirty="0">
+                <a:latin typeface="Aptos" panose="020B0004020202020204" pitchFamily="34" charset="0"/>
+              </a:rPr>
               <a:t>	GET /heartrate/today/</a:t>
             </a:r>
           </a:p>
@@ -14174,7 +14258,9 @@
               <a:buNone/>
             </a:pPr>
             <a:r>
-              <a:rPr lang="en-GB" b="1" dirty="0"/>
+              <a:rPr lang="en-GB" b="1" dirty="0">
+                <a:latin typeface="Aptos" panose="020B0004020202020204" pitchFamily="34" charset="0"/>
+              </a:rPr>
               <a:t>	DELETE /user/1</a:t>
             </a:r>
           </a:p>
